--- a/apresentacao-aprovacao-hackathon-senai-2026.pptx
+++ b/apresentacao-aprovacao-hackathon-senai-2026.pptx
@@ -9213,8 +9213,8 @@
         </p:nvSpPr>
         <p:spPr>
           <a:xfrm>
-            <a:off x="914400" y="1261872"/>
-            <a:ext cx="1600200" cy="256032"/>
+            <a:off x="868680" y="1133856"/>
+            <a:ext cx="1554480" cy="201168"/>
           </a:xfrm>
           <a:prstGeom prst="rect">
             <a:avLst/>
@@ -9230,14 +9230,14 @@
               <a:buNone/>
             </a:pPr>
             <a:r>
-              <a:rPr lang="en-US" sz="1200" b="1" dirty="0">
+              <a:rPr lang="en-US" sz="930" b="1" dirty="0">
                 <a:solidFill>
                   <a:srgbClr val="108DFF"/>
                 </a:solidFill>
               </a:rPr>
               <a:t>08:00 - 08:20</a:t>
             </a:r>
-            <a:endParaRPr lang="en-US" sz="1200" dirty="0"/>
+            <a:endParaRPr lang="en-US" sz="930" dirty="0"/>
           </a:p>
         </p:txBody>
       </p:sp>
@@ -9249,8 +9249,8 @@
         </p:nvSpPr>
         <p:spPr>
           <a:xfrm>
-            <a:off x="2743200" y="1261872"/>
-            <a:ext cx="7863840" cy="256032"/>
+            <a:off x="2651760" y="1133856"/>
+            <a:ext cx="8046720" cy="201168"/>
           </a:xfrm>
           <a:prstGeom prst="rect">
             <a:avLst/>
@@ -9266,14 +9266,14 @@
               <a:buNone/>
             </a:pPr>
             <a:r>
-              <a:rPr lang="en-US" sz="1240" dirty="0">
+              <a:rPr lang="en-US" sz="980" dirty="0">
                 <a:solidFill>
                   <a:srgbClr val="F6FBFF"/>
                 </a:solidFill>
               </a:rPr>
               <a:t>Abertura e apresentação do desafio</a:t>
             </a:r>
-            <a:endParaRPr lang="en-US" sz="1240" dirty="0"/>
+            <a:endParaRPr lang="en-US" sz="980" dirty="0"/>
           </a:p>
         </p:txBody>
       </p:sp>
@@ -9285,7 +9285,7 @@
         </p:nvSpPr>
         <p:spPr>
           <a:xfrm>
-            <a:off x="868680" y="1645920"/>
+            <a:off x="868680" y="1399032"/>
             <a:ext cx="10012680" cy="0"/>
           </a:xfrm>
           <a:prstGeom prst="line">
@@ -9295,7 +9295,7 @@
           <a:ln w="12700">
             <a:solidFill>
               <a:srgbClr val="1B6FB8">
-                <a:alpha val="32000"/>
+                <a:alpha val="26000"/>
               </a:srgbClr>
             </a:solidFill>
             <a:prstDash val="solid"/>
@@ -9310,8 +9310,8 @@
         </p:nvSpPr>
         <p:spPr>
           <a:xfrm>
-            <a:off x="914400" y="1865376"/>
-            <a:ext cx="1600200" cy="256032"/>
+            <a:off x="868680" y="1472184"/>
+            <a:ext cx="1554480" cy="201168"/>
           </a:xfrm>
           <a:prstGeom prst="rect">
             <a:avLst/>
@@ -9327,14 +9327,14 @@
               <a:buNone/>
             </a:pPr>
             <a:r>
-              <a:rPr lang="en-US" sz="1200" b="1" dirty="0">
+              <a:rPr lang="en-US" sz="930" b="1" dirty="0">
                 <a:solidFill>
                   <a:srgbClr val="108DFF"/>
                 </a:solidFill>
               </a:rPr>
               <a:t>08:20 - 10:20</a:t>
             </a:r>
-            <a:endParaRPr lang="en-US" sz="1200" dirty="0"/>
+            <a:endParaRPr lang="en-US" sz="930" dirty="0"/>
           </a:p>
         </p:txBody>
       </p:sp>
@@ -9346,8 +9346,8 @@
         </p:nvSpPr>
         <p:spPr>
           <a:xfrm>
-            <a:off x="2743200" y="1865376"/>
-            <a:ext cx="7863840" cy="256032"/>
+            <a:off x="2651760" y="1472184"/>
+            <a:ext cx="8046720" cy="201168"/>
           </a:xfrm>
           <a:prstGeom prst="rect">
             <a:avLst/>
@@ -9363,14 +9363,14 @@
               <a:buNone/>
             </a:pPr>
             <a:r>
-              <a:rPr lang="en-US" sz="1240" dirty="0">
+              <a:rPr lang="en-US" sz="980" dirty="0">
                 <a:solidFill>
                   <a:srgbClr val="F6FBFF"/>
                 </a:solidFill>
               </a:rPr>
               <a:t>Modelagem e prototipagem em papel</a:t>
             </a:r>
-            <a:endParaRPr lang="en-US" sz="1240" dirty="0"/>
+            <a:endParaRPr lang="en-US" sz="980" dirty="0"/>
           </a:p>
         </p:txBody>
       </p:sp>
@@ -9382,7 +9382,7 @@
         </p:nvSpPr>
         <p:spPr>
           <a:xfrm>
-            <a:off x="868680" y="2249424"/>
+            <a:off x="868680" y="1737360"/>
             <a:ext cx="10012680" cy="0"/>
           </a:xfrm>
           <a:prstGeom prst="line">
@@ -9392,7 +9392,7 @@
           <a:ln w="12700">
             <a:solidFill>
               <a:srgbClr val="1B6FB8">
-                <a:alpha val="32000"/>
+                <a:alpha val="26000"/>
               </a:srgbClr>
             </a:solidFill>
             <a:prstDash val="solid"/>
@@ -9407,8 +9407,8 @@
         </p:nvSpPr>
         <p:spPr>
           <a:xfrm>
-            <a:off x="914400" y="2468880"/>
-            <a:ext cx="1600200" cy="256032"/>
+            <a:off x="868680" y="1810512"/>
+            <a:ext cx="1554480" cy="201168"/>
           </a:xfrm>
           <a:prstGeom prst="rect">
             <a:avLst/>
@@ -9424,14 +9424,14 @@
               <a:buNone/>
             </a:pPr>
             <a:r>
-              <a:rPr lang="en-US" sz="1200" b="1" dirty="0">
+              <a:rPr lang="en-US" sz="930" b="1" dirty="0">
                 <a:solidFill>
                   <a:srgbClr val="108DFF"/>
                 </a:solidFill>
               </a:rPr>
               <a:t>10:20 - 10:35</a:t>
             </a:r>
-            <a:endParaRPr lang="en-US" sz="1200" dirty="0"/>
+            <a:endParaRPr lang="en-US" sz="930" dirty="0"/>
           </a:p>
         </p:txBody>
       </p:sp>
@@ -9443,8 +9443,8 @@
         </p:nvSpPr>
         <p:spPr>
           <a:xfrm>
-            <a:off x="2743200" y="2468880"/>
-            <a:ext cx="7863840" cy="256032"/>
+            <a:off x="2651760" y="1810512"/>
+            <a:ext cx="8046720" cy="201168"/>
           </a:xfrm>
           <a:prstGeom prst="rect">
             <a:avLst/>
@@ -9460,14 +9460,14 @@
               <a:buNone/>
             </a:pPr>
             <a:r>
-              <a:rPr lang="en-US" sz="1240" dirty="0">
+              <a:rPr lang="en-US" sz="980" dirty="0">
                 <a:solidFill>
                   <a:srgbClr val="F6FBFF"/>
                 </a:solidFill>
               </a:rPr>
               <a:t>Coffee break</a:t>
             </a:r>
-            <a:endParaRPr lang="en-US" sz="1240" dirty="0"/>
+            <a:endParaRPr lang="en-US" sz="980" dirty="0"/>
           </a:p>
         </p:txBody>
       </p:sp>
@@ -9479,7 +9479,7 @@
         </p:nvSpPr>
         <p:spPr>
           <a:xfrm>
-            <a:off x="868680" y="2852928"/>
+            <a:off x="868680" y="2075688"/>
             <a:ext cx="10012680" cy="0"/>
           </a:xfrm>
           <a:prstGeom prst="line">
@@ -9489,7 +9489,7 @@
           <a:ln w="12700">
             <a:solidFill>
               <a:srgbClr val="1B6FB8">
-                <a:alpha val="32000"/>
+                <a:alpha val="26000"/>
               </a:srgbClr>
             </a:solidFill>
             <a:prstDash val="solid"/>
@@ -9504,8 +9504,8 @@
         </p:nvSpPr>
         <p:spPr>
           <a:xfrm>
-            <a:off x="914400" y="3072384"/>
-            <a:ext cx="1600200" cy="256032"/>
+            <a:off x="868680" y="2148840"/>
+            <a:ext cx="1554480" cy="201168"/>
           </a:xfrm>
           <a:prstGeom prst="rect">
             <a:avLst/>
@@ -9521,14 +9521,14 @@
               <a:buNone/>
             </a:pPr>
             <a:r>
-              <a:rPr lang="en-US" sz="1200" b="1" dirty="0">
+              <a:rPr lang="en-US" sz="930" b="1" dirty="0">
                 <a:solidFill>
                   <a:srgbClr val="108DFF"/>
                 </a:solidFill>
               </a:rPr>
-              <a:t>10:35 - 14:35</a:t>
-            </a:r>
-            <a:endParaRPr lang="en-US" sz="1200" dirty="0"/>
+              <a:t>10:35 - 11:15</a:t>
+            </a:r>
+            <a:endParaRPr lang="en-US" sz="930" dirty="0"/>
           </a:p>
         </p:txBody>
       </p:sp>
@@ -9540,8 +9540,8 @@
         </p:nvSpPr>
         <p:spPr>
           <a:xfrm>
-            <a:off x="2743200" y="3072384"/>
-            <a:ext cx="7863840" cy="256032"/>
+            <a:off x="2651760" y="2148840"/>
+            <a:ext cx="8046720" cy="201168"/>
           </a:xfrm>
           <a:prstGeom prst="rect">
             <a:avLst/>
@@ -9557,14 +9557,14 @@
               <a:buNone/>
             </a:pPr>
             <a:r>
-              <a:rPr lang="en-US" sz="1240" dirty="0">
+              <a:rPr lang="en-US" sz="980" dirty="0">
                 <a:solidFill>
                   <a:srgbClr val="F6FBFF"/>
                 </a:solidFill>
               </a:rPr>
-              <a:t>Desenvolvimento da solução</a:t>
-            </a:r>
-            <a:endParaRPr lang="en-US" sz="1240" dirty="0"/>
+              <a:t>Início do desenvolvimento</a:t>
+            </a:r>
+            <a:endParaRPr lang="en-US" sz="980" dirty="0"/>
           </a:p>
         </p:txBody>
       </p:sp>
@@ -9576,7 +9576,7 @@
         </p:nvSpPr>
         <p:spPr>
           <a:xfrm>
-            <a:off x="868680" y="3456432"/>
+            <a:off x="868680" y="2414016"/>
             <a:ext cx="10012680" cy="0"/>
           </a:xfrm>
           <a:prstGeom prst="line">
@@ -9586,7 +9586,7 @@
           <a:ln w="12700">
             <a:solidFill>
               <a:srgbClr val="1B6FB8">
-                <a:alpha val="32000"/>
+                <a:alpha val="26000"/>
               </a:srgbClr>
             </a:solidFill>
             <a:prstDash val="solid"/>
@@ -9601,8 +9601,8 @@
         </p:nvSpPr>
         <p:spPr>
           <a:xfrm>
-            <a:off x="914400" y="3675888"/>
-            <a:ext cx="1600200" cy="256032"/>
+            <a:off x="868680" y="2487168"/>
+            <a:ext cx="1554480" cy="201168"/>
           </a:xfrm>
           <a:prstGeom prst="rect">
             <a:avLst/>
@@ -9618,27 +9618,415 @@
               <a:buNone/>
             </a:pPr>
             <a:r>
-              <a:rPr lang="en-US" sz="1200" b="1" dirty="0">
+              <a:rPr lang="en-US" sz="930" b="1" dirty="0">
+                <a:solidFill>
+                  <a:srgbClr val="FF7417"/>
+                </a:solidFill>
+              </a:rPr>
+              <a:t>11:15 - 11:25</a:t>
+            </a:r>
+            <a:endParaRPr lang="en-US" sz="930" dirty="0"/>
+          </a:p>
+        </p:txBody>
+      </p:sp>
+      <p:sp>
+        <p:nvSpPr>
+          <p:cNvPr id="22" name="Text 20"/>
+          <p:cNvSpPr/>
+          <p:nvPr/>
+        </p:nvSpPr>
+        <p:spPr>
+          <a:xfrm>
+            <a:off x="2651760" y="2487168"/>
+            <a:ext cx="8046720" cy="201168"/>
+          </a:xfrm>
+          <a:prstGeom prst="rect">
+            <a:avLst/>
+          </a:prstGeom>
+          <a:noFill/>
+          <a:ln/>
+        </p:spPr>
+        <p:txBody>
+          <a:bodyPr wrap="square" lIns="0" tIns="0" rIns="0" bIns="0" rtlCol="0" anchor="ctr"/>
+          <a:lstStyle/>
+          <a:p>
+            <a:pPr indent="0" marL="0">
+              <a:buNone/>
+            </a:pPr>
+            <a:r>
+              <a:rPr lang="en-US" sz="980" dirty="0">
+                <a:solidFill>
+                  <a:srgbClr val="F6FBFF"/>
+                </a:solidFill>
+              </a:rPr>
+              <a:t>Janela IA #1</a:t>
+            </a:r>
+            <a:endParaRPr lang="en-US" sz="980" dirty="0"/>
+          </a:p>
+        </p:txBody>
+      </p:sp>
+      <p:sp>
+        <p:nvSpPr>
+          <p:cNvPr id="23" name="Shape 21"/>
+          <p:cNvSpPr/>
+          <p:nvPr/>
+        </p:nvSpPr>
+        <p:spPr>
+          <a:xfrm>
+            <a:off x="868680" y="2752344"/>
+            <a:ext cx="10012680" cy="0"/>
+          </a:xfrm>
+          <a:prstGeom prst="line">
+            <a:avLst/>
+          </a:prstGeom>
+          <a:noFill/>
+          <a:ln w="12700">
+            <a:solidFill>
+              <a:srgbClr val="1B6FB8">
+                <a:alpha val="26000"/>
+              </a:srgbClr>
+            </a:solidFill>
+            <a:prstDash val="solid"/>
+          </a:ln>
+        </p:spPr>
+      </p:sp>
+      <p:sp>
+        <p:nvSpPr>
+          <p:cNvPr id="24" name="Text 22"/>
+          <p:cNvSpPr/>
+          <p:nvPr/>
+        </p:nvSpPr>
+        <p:spPr>
+          <a:xfrm>
+            <a:off x="868680" y="2825496"/>
+            <a:ext cx="1554480" cy="201168"/>
+          </a:xfrm>
+          <a:prstGeom prst="rect">
+            <a:avLst/>
+          </a:prstGeom>
+          <a:noFill/>
+          <a:ln/>
+        </p:spPr>
+        <p:txBody>
+          <a:bodyPr wrap="square" lIns="0" tIns="0" rIns="0" bIns="0" rtlCol="0" anchor="ctr"/>
+          <a:lstStyle/>
+          <a:p>
+            <a:pPr indent="0" marL="0">
+              <a:buNone/>
+            </a:pPr>
+            <a:r>
+              <a:rPr lang="en-US" sz="930" b="1" dirty="0">
+                <a:solidFill>
+                  <a:srgbClr val="FF7417"/>
+                </a:solidFill>
+              </a:rPr>
+              <a:t>11:25 - 12:05</a:t>
+            </a:r>
+            <a:endParaRPr lang="en-US" sz="930" dirty="0"/>
+          </a:p>
+        </p:txBody>
+      </p:sp>
+      <p:sp>
+        <p:nvSpPr>
+          <p:cNvPr id="25" name="Text 23"/>
+          <p:cNvSpPr/>
+          <p:nvPr/>
+        </p:nvSpPr>
+        <p:spPr>
+          <a:xfrm>
+            <a:off x="2651760" y="2825496"/>
+            <a:ext cx="8046720" cy="201168"/>
+          </a:xfrm>
+          <a:prstGeom prst="rect">
+            <a:avLst/>
+          </a:prstGeom>
+          <a:noFill/>
+          <a:ln/>
+        </p:spPr>
+        <p:txBody>
+          <a:bodyPr wrap="square" lIns="0" tIns="0" rIns="0" bIns="0" rtlCol="0" anchor="ctr"/>
+          <a:lstStyle/>
+          <a:p>
+            <a:pPr indent="0" marL="0">
+              <a:buNone/>
+            </a:pPr>
+            <a:r>
+              <a:rPr lang="en-US" sz="980" dirty="0">
+                <a:solidFill>
+                  <a:srgbClr val="F6FBFF"/>
+                </a:solidFill>
+              </a:rPr>
+              <a:t>Desenvolvimento sem IA</a:t>
+            </a:r>
+            <a:endParaRPr lang="en-US" sz="980" dirty="0"/>
+          </a:p>
+        </p:txBody>
+      </p:sp>
+      <p:sp>
+        <p:nvSpPr>
+          <p:cNvPr id="26" name="Shape 24"/>
+          <p:cNvSpPr/>
+          <p:nvPr/>
+        </p:nvSpPr>
+        <p:spPr>
+          <a:xfrm>
+            <a:off x="868680" y="3090672"/>
+            <a:ext cx="10012680" cy="0"/>
+          </a:xfrm>
+          <a:prstGeom prst="line">
+            <a:avLst/>
+          </a:prstGeom>
+          <a:noFill/>
+          <a:ln w="12700">
+            <a:solidFill>
+              <a:srgbClr val="1B6FB8">
+                <a:alpha val="26000"/>
+              </a:srgbClr>
+            </a:solidFill>
+            <a:prstDash val="solid"/>
+          </a:ln>
+        </p:spPr>
+      </p:sp>
+      <p:sp>
+        <p:nvSpPr>
+          <p:cNvPr id="27" name="Text 25"/>
+          <p:cNvSpPr/>
+          <p:nvPr/>
+        </p:nvSpPr>
+        <p:spPr>
+          <a:xfrm>
+            <a:off x="868680" y="3163824"/>
+            <a:ext cx="1554480" cy="201168"/>
+          </a:xfrm>
+          <a:prstGeom prst="rect">
+            <a:avLst/>
+          </a:prstGeom>
+          <a:noFill/>
+          <a:ln/>
+        </p:spPr>
+        <p:txBody>
+          <a:bodyPr wrap="square" lIns="0" tIns="0" rIns="0" bIns="0" rtlCol="0" anchor="ctr"/>
+          <a:lstStyle/>
+          <a:p>
+            <a:pPr indent="0" marL="0">
+              <a:buNone/>
+            </a:pPr>
+            <a:r>
+              <a:rPr lang="en-US" sz="930" b="1" dirty="0">
+                <a:solidFill>
+                  <a:srgbClr val="FF7417"/>
+                </a:solidFill>
+              </a:rPr>
+              <a:t>12:05 - 12:15</a:t>
+            </a:r>
+            <a:endParaRPr lang="en-US" sz="930" dirty="0"/>
+          </a:p>
+        </p:txBody>
+      </p:sp>
+      <p:sp>
+        <p:nvSpPr>
+          <p:cNvPr id="28" name="Text 26"/>
+          <p:cNvSpPr/>
+          <p:nvPr/>
+        </p:nvSpPr>
+        <p:spPr>
+          <a:xfrm>
+            <a:off x="2651760" y="3163824"/>
+            <a:ext cx="8046720" cy="201168"/>
+          </a:xfrm>
+          <a:prstGeom prst="rect">
+            <a:avLst/>
+          </a:prstGeom>
+          <a:noFill/>
+          <a:ln/>
+        </p:spPr>
+        <p:txBody>
+          <a:bodyPr wrap="square" lIns="0" tIns="0" rIns="0" bIns="0" rtlCol="0" anchor="ctr"/>
+          <a:lstStyle/>
+          <a:p>
+            <a:pPr indent="0" marL="0">
+              <a:buNone/>
+            </a:pPr>
+            <a:r>
+              <a:rPr lang="en-US" sz="980" dirty="0">
+                <a:solidFill>
+                  <a:srgbClr val="F6FBFF"/>
+                </a:solidFill>
+              </a:rPr>
+              <a:t>Janela IA #2</a:t>
+            </a:r>
+            <a:endParaRPr lang="en-US" sz="980" dirty="0"/>
+          </a:p>
+        </p:txBody>
+      </p:sp>
+      <p:sp>
+        <p:nvSpPr>
+          <p:cNvPr id="29" name="Shape 27"/>
+          <p:cNvSpPr/>
+          <p:nvPr/>
+        </p:nvSpPr>
+        <p:spPr>
+          <a:xfrm>
+            <a:off x="868680" y="3429000"/>
+            <a:ext cx="10012680" cy="0"/>
+          </a:xfrm>
+          <a:prstGeom prst="line">
+            <a:avLst/>
+          </a:prstGeom>
+          <a:noFill/>
+          <a:ln w="12700">
+            <a:solidFill>
+              <a:srgbClr val="1B6FB8">
+                <a:alpha val="26000"/>
+              </a:srgbClr>
+            </a:solidFill>
+            <a:prstDash val="solid"/>
+          </a:ln>
+        </p:spPr>
+      </p:sp>
+      <p:sp>
+        <p:nvSpPr>
+          <p:cNvPr id="30" name="Text 28"/>
+          <p:cNvSpPr/>
+          <p:nvPr/>
+        </p:nvSpPr>
+        <p:spPr>
+          <a:xfrm>
+            <a:off x="868680" y="3502152"/>
+            <a:ext cx="1554480" cy="201168"/>
+          </a:xfrm>
+          <a:prstGeom prst="rect">
+            <a:avLst/>
+          </a:prstGeom>
+          <a:noFill/>
+          <a:ln/>
+        </p:spPr>
+        <p:txBody>
+          <a:bodyPr wrap="square" lIns="0" tIns="0" rIns="0" bIns="0" rtlCol="0" anchor="ctr"/>
+          <a:lstStyle/>
+          <a:p>
+            <a:pPr indent="0" marL="0">
+              <a:buNone/>
+            </a:pPr>
+            <a:r>
+              <a:rPr lang="en-US" sz="930" b="1" dirty="0">
                 <a:solidFill>
                   <a:srgbClr val="108DFF"/>
                 </a:solidFill>
               </a:rPr>
+              <a:t>12:15 - 12:30</a:t>
+            </a:r>
+            <a:endParaRPr lang="en-US" sz="930" dirty="0"/>
+          </a:p>
+        </p:txBody>
+      </p:sp>
+      <p:sp>
+        <p:nvSpPr>
+          <p:cNvPr id="31" name="Text 29"/>
+          <p:cNvSpPr/>
+          <p:nvPr/>
+        </p:nvSpPr>
+        <p:spPr>
+          <a:xfrm>
+            <a:off x="2651760" y="3502152"/>
+            <a:ext cx="8046720" cy="201168"/>
+          </a:xfrm>
+          <a:prstGeom prst="rect">
+            <a:avLst/>
+          </a:prstGeom>
+          <a:noFill/>
+          <a:ln/>
+        </p:spPr>
+        <p:txBody>
+          <a:bodyPr wrap="square" lIns="0" tIns="0" rIns="0" bIns="0" rtlCol="0" anchor="ctr"/>
+          <a:lstStyle/>
+          <a:p>
+            <a:pPr indent="0" marL="0">
+              <a:buNone/>
+            </a:pPr>
+            <a:r>
+              <a:rPr lang="en-US" sz="980" dirty="0">
+                <a:solidFill>
+                  <a:srgbClr val="F6FBFF"/>
+                </a:solidFill>
+              </a:rPr>
+              <a:t>Desenvolvimento e ajustes</a:t>
+            </a:r>
+            <a:endParaRPr lang="en-US" sz="980" dirty="0"/>
+          </a:p>
+        </p:txBody>
+      </p:sp>
+      <p:sp>
+        <p:nvSpPr>
+          <p:cNvPr id="32" name="Shape 30"/>
+          <p:cNvSpPr/>
+          <p:nvPr/>
+        </p:nvSpPr>
+        <p:spPr>
+          <a:xfrm>
+            <a:off x="868680" y="3767328"/>
+            <a:ext cx="10012680" cy="0"/>
+          </a:xfrm>
+          <a:prstGeom prst="line">
+            <a:avLst/>
+          </a:prstGeom>
+          <a:noFill/>
+          <a:ln w="12700">
+            <a:solidFill>
+              <a:srgbClr val="1B6FB8">
+                <a:alpha val="26000"/>
+              </a:srgbClr>
+            </a:solidFill>
+            <a:prstDash val="solid"/>
+          </a:ln>
+        </p:spPr>
+      </p:sp>
+      <p:sp>
+        <p:nvSpPr>
+          <p:cNvPr id="33" name="Text 31"/>
+          <p:cNvSpPr/>
+          <p:nvPr/>
+        </p:nvSpPr>
+        <p:spPr>
+          <a:xfrm>
+            <a:off x="868680" y="3840480"/>
+            <a:ext cx="1554480" cy="201168"/>
+          </a:xfrm>
+          <a:prstGeom prst="rect">
+            <a:avLst/>
+          </a:prstGeom>
+          <a:noFill/>
+          <a:ln/>
+        </p:spPr>
+        <p:txBody>
+          <a:bodyPr wrap="square" lIns="0" tIns="0" rIns="0" bIns="0" rtlCol="0" anchor="ctr"/>
+          <a:lstStyle/>
+          <a:p>
+            <a:pPr indent="0" marL="0">
+              <a:buNone/>
+            </a:pPr>
+            <a:r>
+              <a:rPr lang="en-US" sz="930" b="1" dirty="0">
+                <a:solidFill>
+                  <a:srgbClr val="108DFF"/>
+                </a:solidFill>
+              </a:rPr>
               <a:t>12:30 - 13:10</a:t>
             </a:r>
-            <a:endParaRPr lang="en-US" sz="1200" dirty="0"/>
-          </a:p>
-        </p:txBody>
-      </p:sp>
-      <p:sp>
-        <p:nvSpPr>
-          <p:cNvPr id="22" name="Text 20"/>
-          <p:cNvSpPr/>
-          <p:nvPr/>
-        </p:nvSpPr>
-        <p:spPr>
-          <a:xfrm>
-            <a:off x="2743200" y="3675888"/>
-            <a:ext cx="7863840" cy="256032"/>
+            <a:endParaRPr lang="en-US" sz="930" dirty="0"/>
+          </a:p>
+        </p:txBody>
+      </p:sp>
+      <p:sp>
+        <p:nvSpPr>
+          <p:cNvPr id="34" name="Text 32"/>
+          <p:cNvSpPr/>
+          <p:nvPr/>
+        </p:nvSpPr>
+        <p:spPr>
+          <a:xfrm>
+            <a:off x="2651760" y="3840480"/>
+            <a:ext cx="8046720" cy="201168"/>
           </a:xfrm>
           <a:prstGeom prst="rect">
             <a:avLst/>
@@ -9654,26 +10042,26 @@
               <a:buNone/>
             </a:pPr>
             <a:r>
-              <a:rPr lang="en-US" sz="1240" dirty="0">
+              <a:rPr lang="en-US" sz="980" dirty="0">
                 <a:solidFill>
                   <a:srgbClr val="F6FBFF"/>
                 </a:solidFill>
               </a:rPr>
               <a:t>Almoço</a:t>
             </a:r>
-            <a:endParaRPr lang="en-US" sz="1240" dirty="0"/>
-          </a:p>
-        </p:txBody>
-      </p:sp>
-      <p:sp>
-        <p:nvSpPr>
-          <p:cNvPr id="23" name="Shape 21"/>
-          <p:cNvSpPr/>
-          <p:nvPr/>
-        </p:nvSpPr>
-        <p:spPr>
-          <a:xfrm>
-            <a:off x="868680" y="4059936"/>
+            <a:endParaRPr lang="en-US" sz="980" dirty="0"/>
+          </a:p>
+        </p:txBody>
+      </p:sp>
+      <p:sp>
+        <p:nvSpPr>
+          <p:cNvPr id="35" name="Shape 33"/>
+          <p:cNvSpPr/>
+          <p:nvPr/>
+        </p:nvSpPr>
+        <p:spPr>
+          <a:xfrm>
+            <a:off x="868680" y="4105656"/>
             <a:ext cx="10012680" cy="0"/>
           </a:xfrm>
           <a:prstGeom prst="line">
@@ -9683,7 +10071,7 @@
           <a:ln w="12700">
             <a:solidFill>
               <a:srgbClr val="1B6FB8">
-                <a:alpha val="32000"/>
+                <a:alpha val="26000"/>
               </a:srgbClr>
             </a:solidFill>
             <a:prstDash val="solid"/>
@@ -9692,14 +10080,14 @@
       </p:sp>
       <p:sp>
         <p:nvSpPr>
-          <p:cNvPr id="24" name="Text 22"/>
-          <p:cNvSpPr/>
-          <p:nvPr/>
-        </p:nvSpPr>
-        <p:spPr>
-          <a:xfrm>
-            <a:off x="914400" y="4279392"/>
-            <a:ext cx="1600200" cy="256032"/>
+          <p:cNvPr id="36" name="Text 34"/>
+          <p:cNvSpPr/>
+          <p:nvPr/>
+        </p:nvSpPr>
+        <p:spPr>
+          <a:xfrm>
+            <a:off x="868680" y="4178808"/>
+            <a:ext cx="1554480" cy="201168"/>
           </a:xfrm>
           <a:prstGeom prst="rect">
             <a:avLst/>
@@ -9715,27 +10103,512 @@
               <a:buNone/>
             </a:pPr>
             <a:r>
-              <a:rPr lang="en-US" sz="1200" b="1" dirty="0">
+              <a:rPr lang="en-US" sz="930" b="1" dirty="0">
                 <a:solidFill>
                   <a:srgbClr val="108DFF"/>
                 </a:solidFill>
               </a:rPr>
+              <a:t>13:10 - 13:40</a:t>
+            </a:r>
+            <a:endParaRPr lang="en-US" sz="930" dirty="0"/>
+          </a:p>
+        </p:txBody>
+      </p:sp>
+      <p:sp>
+        <p:nvSpPr>
+          <p:cNvPr id="37" name="Text 35"/>
+          <p:cNvSpPr/>
+          <p:nvPr/>
+        </p:nvSpPr>
+        <p:spPr>
+          <a:xfrm>
+            <a:off x="2651760" y="4178808"/>
+            <a:ext cx="8046720" cy="201168"/>
+          </a:xfrm>
+          <a:prstGeom prst="rect">
+            <a:avLst/>
+          </a:prstGeom>
+          <a:noFill/>
+          <a:ln/>
+        </p:spPr>
+        <p:txBody>
+          <a:bodyPr wrap="square" lIns="0" tIns="0" rIns="0" bIns="0" rtlCol="0" anchor="ctr"/>
+          <a:lstStyle/>
+          <a:p>
+            <a:pPr indent="0" marL="0">
+              <a:buNone/>
+            </a:pPr>
+            <a:r>
+              <a:rPr lang="en-US" sz="980" dirty="0">
+                <a:solidFill>
+                  <a:srgbClr val="F6FBFF"/>
+                </a:solidFill>
+              </a:rPr>
+              <a:t>Retomada do desenvolvimento</a:t>
+            </a:r>
+            <a:endParaRPr lang="en-US" sz="980" dirty="0"/>
+          </a:p>
+        </p:txBody>
+      </p:sp>
+      <p:sp>
+        <p:nvSpPr>
+          <p:cNvPr id="38" name="Shape 36"/>
+          <p:cNvSpPr/>
+          <p:nvPr/>
+        </p:nvSpPr>
+        <p:spPr>
+          <a:xfrm>
+            <a:off x="868680" y="4443984"/>
+            <a:ext cx="10012680" cy="0"/>
+          </a:xfrm>
+          <a:prstGeom prst="line">
+            <a:avLst/>
+          </a:prstGeom>
+          <a:noFill/>
+          <a:ln w="12700">
+            <a:solidFill>
+              <a:srgbClr val="1B6FB8">
+                <a:alpha val="26000"/>
+              </a:srgbClr>
+            </a:solidFill>
+            <a:prstDash val="solid"/>
+          </a:ln>
+        </p:spPr>
+      </p:sp>
+      <p:sp>
+        <p:nvSpPr>
+          <p:cNvPr id="39" name="Text 37"/>
+          <p:cNvSpPr/>
+          <p:nvPr/>
+        </p:nvSpPr>
+        <p:spPr>
+          <a:xfrm>
+            <a:off x="868680" y="4517136"/>
+            <a:ext cx="1554480" cy="201168"/>
+          </a:xfrm>
+          <a:prstGeom prst="rect">
+            <a:avLst/>
+          </a:prstGeom>
+          <a:noFill/>
+          <a:ln/>
+        </p:spPr>
+        <p:txBody>
+          <a:bodyPr wrap="square" lIns="0" tIns="0" rIns="0" bIns="0" rtlCol="0" anchor="ctr"/>
+          <a:lstStyle/>
+          <a:p>
+            <a:pPr indent="0" marL="0">
+              <a:buNone/>
+            </a:pPr>
+            <a:r>
+              <a:rPr lang="en-US" sz="930" b="1" dirty="0">
+                <a:solidFill>
+                  <a:srgbClr val="FF7417"/>
+                </a:solidFill>
+              </a:rPr>
+              <a:t>13:40 - 13:50</a:t>
+            </a:r>
+            <a:endParaRPr lang="en-US" sz="930" dirty="0"/>
+          </a:p>
+        </p:txBody>
+      </p:sp>
+      <p:sp>
+        <p:nvSpPr>
+          <p:cNvPr id="40" name="Text 38"/>
+          <p:cNvSpPr/>
+          <p:nvPr/>
+        </p:nvSpPr>
+        <p:spPr>
+          <a:xfrm>
+            <a:off x="2651760" y="4517136"/>
+            <a:ext cx="8046720" cy="201168"/>
+          </a:xfrm>
+          <a:prstGeom prst="rect">
+            <a:avLst/>
+          </a:prstGeom>
+          <a:noFill/>
+          <a:ln/>
+        </p:spPr>
+        <p:txBody>
+          <a:bodyPr wrap="square" lIns="0" tIns="0" rIns="0" bIns="0" rtlCol="0" anchor="ctr"/>
+          <a:lstStyle/>
+          <a:p>
+            <a:pPr indent="0" marL="0">
+              <a:buNone/>
+            </a:pPr>
+            <a:r>
+              <a:rPr lang="en-US" sz="980" dirty="0">
+                <a:solidFill>
+                  <a:srgbClr val="F6FBFF"/>
+                </a:solidFill>
+              </a:rPr>
+              <a:t>Janela IA #3</a:t>
+            </a:r>
+            <a:endParaRPr lang="en-US" sz="980" dirty="0"/>
+          </a:p>
+        </p:txBody>
+      </p:sp>
+      <p:sp>
+        <p:nvSpPr>
+          <p:cNvPr id="41" name="Shape 39"/>
+          <p:cNvSpPr/>
+          <p:nvPr/>
+        </p:nvSpPr>
+        <p:spPr>
+          <a:xfrm>
+            <a:off x="868680" y="4782312"/>
+            <a:ext cx="10012680" cy="0"/>
+          </a:xfrm>
+          <a:prstGeom prst="line">
+            <a:avLst/>
+          </a:prstGeom>
+          <a:noFill/>
+          <a:ln w="12700">
+            <a:solidFill>
+              <a:srgbClr val="1B6FB8">
+                <a:alpha val="26000"/>
+              </a:srgbClr>
+            </a:solidFill>
+            <a:prstDash val="solid"/>
+          </a:ln>
+        </p:spPr>
+      </p:sp>
+      <p:sp>
+        <p:nvSpPr>
+          <p:cNvPr id="42" name="Text 40"/>
+          <p:cNvSpPr/>
+          <p:nvPr/>
+        </p:nvSpPr>
+        <p:spPr>
+          <a:xfrm>
+            <a:off x="868680" y="4855464"/>
+            <a:ext cx="1554480" cy="201168"/>
+          </a:xfrm>
+          <a:prstGeom prst="rect">
+            <a:avLst/>
+          </a:prstGeom>
+          <a:noFill/>
+          <a:ln/>
+        </p:spPr>
+        <p:txBody>
+          <a:bodyPr wrap="square" lIns="0" tIns="0" rIns="0" bIns="0" rtlCol="0" anchor="ctr"/>
+          <a:lstStyle/>
+          <a:p>
+            <a:pPr indent="0" marL="0">
+              <a:buNone/>
+            </a:pPr>
+            <a:r>
+              <a:rPr lang="en-US" sz="930" b="1" dirty="0">
+                <a:solidFill>
+                  <a:srgbClr val="108DFF"/>
+                </a:solidFill>
+              </a:rPr>
+              <a:t>13:50 - 14:15</a:t>
+            </a:r>
+            <a:endParaRPr lang="en-US" sz="930" dirty="0"/>
+          </a:p>
+        </p:txBody>
+      </p:sp>
+      <p:sp>
+        <p:nvSpPr>
+          <p:cNvPr id="43" name="Text 41"/>
+          <p:cNvSpPr/>
+          <p:nvPr/>
+        </p:nvSpPr>
+        <p:spPr>
+          <a:xfrm>
+            <a:off x="2651760" y="4855464"/>
+            <a:ext cx="8046720" cy="201168"/>
+          </a:xfrm>
+          <a:prstGeom prst="rect">
+            <a:avLst/>
+          </a:prstGeom>
+          <a:noFill/>
+          <a:ln/>
+        </p:spPr>
+        <p:txBody>
+          <a:bodyPr wrap="square" lIns="0" tIns="0" rIns="0" bIns="0" rtlCol="0" anchor="ctr"/>
+          <a:lstStyle/>
+          <a:p>
+            <a:pPr indent="0" marL="0">
+              <a:buNone/>
+            </a:pPr>
+            <a:r>
+              <a:rPr lang="en-US" sz="980" dirty="0">
+                <a:solidFill>
+                  <a:srgbClr val="F6FBFF"/>
+                </a:solidFill>
+              </a:rPr>
+              <a:t>Correções e integração</a:t>
+            </a:r>
+            <a:endParaRPr lang="en-US" sz="980" dirty="0"/>
+          </a:p>
+        </p:txBody>
+      </p:sp>
+      <p:sp>
+        <p:nvSpPr>
+          <p:cNvPr id="44" name="Shape 42"/>
+          <p:cNvSpPr/>
+          <p:nvPr/>
+        </p:nvSpPr>
+        <p:spPr>
+          <a:xfrm>
+            <a:off x="868680" y="5120640"/>
+            <a:ext cx="10012680" cy="0"/>
+          </a:xfrm>
+          <a:prstGeom prst="line">
+            <a:avLst/>
+          </a:prstGeom>
+          <a:noFill/>
+          <a:ln w="12700">
+            <a:solidFill>
+              <a:srgbClr val="1B6FB8">
+                <a:alpha val="26000"/>
+              </a:srgbClr>
+            </a:solidFill>
+            <a:prstDash val="solid"/>
+          </a:ln>
+        </p:spPr>
+      </p:sp>
+      <p:sp>
+        <p:nvSpPr>
+          <p:cNvPr id="45" name="Text 43"/>
+          <p:cNvSpPr/>
+          <p:nvPr/>
+        </p:nvSpPr>
+        <p:spPr>
+          <a:xfrm>
+            <a:off x="868680" y="5193792"/>
+            <a:ext cx="1554480" cy="201168"/>
+          </a:xfrm>
+          <a:prstGeom prst="rect">
+            <a:avLst/>
+          </a:prstGeom>
+          <a:noFill/>
+          <a:ln/>
+        </p:spPr>
+        <p:txBody>
+          <a:bodyPr wrap="square" lIns="0" tIns="0" rIns="0" bIns="0" rtlCol="0" anchor="ctr"/>
+          <a:lstStyle/>
+          <a:p>
+            <a:pPr indent="0" marL="0">
+              <a:buNone/>
+            </a:pPr>
+            <a:r>
+              <a:rPr lang="en-US" sz="930" b="1" dirty="0">
+                <a:solidFill>
+                  <a:srgbClr val="FF7417"/>
+                </a:solidFill>
+              </a:rPr>
+              <a:t>14:15 - 14:25</a:t>
+            </a:r>
+            <a:endParaRPr lang="en-US" sz="930" dirty="0"/>
+          </a:p>
+        </p:txBody>
+      </p:sp>
+      <p:sp>
+        <p:nvSpPr>
+          <p:cNvPr id="46" name="Text 44"/>
+          <p:cNvSpPr/>
+          <p:nvPr/>
+        </p:nvSpPr>
+        <p:spPr>
+          <a:xfrm>
+            <a:off x="2651760" y="5193792"/>
+            <a:ext cx="8046720" cy="201168"/>
+          </a:xfrm>
+          <a:prstGeom prst="rect">
+            <a:avLst/>
+          </a:prstGeom>
+          <a:noFill/>
+          <a:ln/>
+        </p:spPr>
+        <p:txBody>
+          <a:bodyPr wrap="square" lIns="0" tIns="0" rIns="0" bIns="0" rtlCol="0" anchor="ctr"/>
+          <a:lstStyle/>
+          <a:p>
+            <a:pPr indent="0" marL="0">
+              <a:buNone/>
+            </a:pPr>
+            <a:r>
+              <a:rPr lang="en-US" sz="980" dirty="0">
+                <a:solidFill>
+                  <a:srgbClr val="F6FBFF"/>
+                </a:solidFill>
+              </a:rPr>
+              <a:t>Janela IA #4</a:t>
+            </a:r>
+            <a:endParaRPr lang="en-US" sz="980" dirty="0"/>
+          </a:p>
+        </p:txBody>
+      </p:sp>
+      <p:sp>
+        <p:nvSpPr>
+          <p:cNvPr id="47" name="Shape 45"/>
+          <p:cNvSpPr/>
+          <p:nvPr/>
+        </p:nvSpPr>
+        <p:spPr>
+          <a:xfrm>
+            <a:off x="868680" y="5458968"/>
+            <a:ext cx="10012680" cy="0"/>
+          </a:xfrm>
+          <a:prstGeom prst="line">
+            <a:avLst/>
+          </a:prstGeom>
+          <a:noFill/>
+          <a:ln w="12700">
+            <a:solidFill>
+              <a:srgbClr val="1B6FB8">
+                <a:alpha val="26000"/>
+              </a:srgbClr>
+            </a:solidFill>
+            <a:prstDash val="solid"/>
+          </a:ln>
+        </p:spPr>
+      </p:sp>
+      <p:sp>
+        <p:nvSpPr>
+          <p:cNvPr id="48" name="Text 46"/>
+          <p:cNvSpPr/>
+          <p:nvPr/>
+        </p:nvSpPr>
+        <p:spPr>
+          <a:xfrm>
+            <a:off x="868680" y="5532120"/>
+            <a:ext cx="1554480" cy="201168"/>
+          </a:xfrm>
+          <a:prstGeom prst="rect">
+            <a:avLst/>
+          </a:prstGeom>
+          <a:noFill/>
+          <a:ln/>
+        </p:spPr>
+        <p:txBody>
+          <a:bodyPr wrap="square" lIns="0" tIns="0" rIns="0" bIns="0" rtlCol="0" anchor="ctr"/>
+          <a:lstStyle/>
+          <a:p>
+            <a:pPr indent="0" marL="0">
+              <a:buNone/>
+            </a:pPr>
+            <a:r>
+              <a:rPr lang="en-US" sz="930" b="1" dirty="0">
+                <a:solidFill>
+                  <a:srgbClr val="108DFF"/>
+                </a:solidFill>
+              </a:rPr>
+              <a:t>14:25 - 14:35</a:t>
+            </a:r>
+            <a:endParaRPr lang="en-US" sz="930" dirty="0"/>
+          </a:p>
+        </p:txBody>
+      </p:sp>
+      <p:sp>
+        <p:nvSpPr>
+          <p:cNvPr id="49" name="Text 47"/>
+          <p:cNvSpPr/>
+          <p:nvPr/>
+        </p:nvSpPr>
+        <p:spPr>
+          <a:xfrm>
+            <a:off x="2651760" y="5532120"/>
+            <a:ext cx="8046720" cy="201168"/>
+          </a:xfrm>
+          <a:prstGeom prst="rect">
+            <a:avLst/>
+          </a:prstGeom>
+          <a:noFill/>
+          <a:ln/>
+        </p:spPr>
+        <p:txBody>
+          <a:bodyPr wrap="square" lIns="0" tIns="0" rIns="0" bIns="0" rtlCol="0" anchor="ctr"/>
+          <a:lstStyle/>
+          <a:p>
+            <a:pPr indent="0" marL="0">
+              <a:buNone/>
+            </a:pPr>
+            <a:r>
+              <a:rPr lang="en-US" sz="980" dirty="0">
+                <a:solidFill>
+                  <a:srgbClr val="F6FBFF"/>
+                </a:solidFill>
+              </a:rPr>
+              <a:t>Fechamento da Fase 2</a:t>
+            </a:r>
+            <a:endParaRPr lang="en-US" sz="980" dirty="0"/>
+          </a:p>
+        </p:txBody>
+      </p:sp>
+      <p:sp>
+        <p:nvSpPr>
+          <p:cNvPr id="50" name="Shape 48"/>
+          <p:cNvSpPr/>
+          <p:nvPr/>
+        </p:nvSpPr>
+        <p:spPr>
+          <a:xfrm>
+            <a:off x="868680" y="5797296"/>
+            <a:ext cx="10012680" cy="0"/>
+          </a:xfrm>
+          <a:prstGeom prst="line">
+            <a:avLst/>
+          </a:prstGeom>
+          <a:noFill/>
+          <a:ln w="12700">
+            <a:solidFill>
+              <a:srgbClr val="1B6FB8">
+                <a:alpha val="26000"/>
+              </a:srgbClr>
+            </a:solidFill>
+            <a:prstDash val="solid"/>
+          </a:ln>
+        </p:spPr>
+      </p:sp>
+      <p:sp>
+        <p:nvSpPr>
+          <p:cNvPr id="51" name="Text 49"/>
+          <p:cNvSpPr/>
+          <p:nvPr/>
+        </p:nvSpPr>
+        <p:spPr>
+          <a:xfrm>
+            <a:off x="868680" y="5870448"/>
+            <a:ext cx="1554480" cy="201168"/>
+          </a:xfrm>
+          <a:prstGeom prst="rect">
+            <a:avLst/>
+          </a:prstGeom>
+          <a:noFill/>
+          <a:ln/>
+        </p:spPr>
+        <p:txBody>
+          <a:bodyPr wrap="square" lIns="0" tIns="0" rIns="0" bIns="0" rtlCol="0" anchor="ctr"/>
+          <a:lstStyle/>
+          <a:p>
+            <a:pPr indent="0" marL="0">
+              <a:buNone/>
+            </a:pPr>
+            <a:r>
+              <a:rPr lang="en-US" sz="930" b="1" dirty="0">
+                <a:solidFill>
+                  <a:srgbClr val="108DFF"/>
+                </a:solidFill>
+              </a:rPr>
               <a:t>14:35 - 15:00</a:t>
             </a:r>
-            <a:endParaRPr lang="en-US" sz="1200" dirty="0"/>
-          </a:p>
-        </p:txBody>
-      </p:sp>
-      <p:sp>
-        <p:nvSpPr>
-          <p:cNvPr id="25" name="Text 23"/>
-          <p:cNvSpPr/>
-          <p:nvPr/>
-        </p:nvSpPr>
-        <p:spPr>
-          <a:xfrm>
-            <a:off x="2743200" y="4279392"/>
-            <a:ext cx="7863840" cy="256032"/>
+            <a:endParaRPr lang="en-US" sz="930" dirty="0"/>
+          </a:p>
+        </p:txBody>
+      </p:sp>
+      <p:sp>
+        <p:nvSpPr>
+          <p:cNvPr id="52" name="Text 50"/>
+          <p:cNvSpPr/>
+          <p:nvPr/>
+        </p:nvSpPr>
+        <p:spPr>
+          <a:xfrm>
+            <a:off x="2651760" y="5870448"/>
+            <a:ext cx="8046720" cy="201168"/>
           </a:xfrm>
           <a:prstGeom prst="rect">
             <a:avLst/>
@@ -9751,26 +10624,26 @@
               <a:buNone/>
             </a:pPr>
             <a:r>
-              <a:rPr lang="en-US" sz="1240" dirty="0">
+              <a:rPr lang="en-US" sz="980" dirty="0">
                 <a:solidFill>
                   <a:srgbClr val="F6FBFF"/>
                 </a:solidFill>
               </a:rPr>
               <a:t>Preparação do pitch</a:t>
             </a:r>
-            <a:endParaRPr lang="en-US" sz="1240" dirty="0"/>
-          </a:p>
-        </p:txBody>
-      </p:sp>
-      <p:sp>
-        <p:nvSpPr>
-          <p:cNvPr id="26" name="Shape 24"/>
-          <p:cNvSpPr/>
-          <p:nvPr/>
-        </p:nvSpPr>
-        <p:spPr>
-          <a:xfrm>
-            <a:off x="868680" y="4663440"/>
+            <a:endParaRPr lang="en-US" sz="980" dirty="0"/>
+          </a:p>
+        </p:txBody>
+      </p:sp>
+      <p:sp>
+        <p:nvSpPr>
+          <p:cNvPr id="53" name="Shape 51"/>
+          <p:cNvSpPr/>
+          <p:nvPr/>
+        </p:nvSpPr>
+        <p:spPr>
+          <a:xfrm>
+            <a:off x="868680" y="6135624"/>
             <a:ext cx="10012680" cy="0"/>
           </a:xfrm>
           <a:prstGeom prst="line">
@@ -9780,7 +10653,7 @@
           <a:ln w="12700">
             <a:solidFill>
               <a:srgbClr val="1B6FB8">
-                <a:alpha val="32000"/>
+                <a:alpha val="26000"/>
               </a:srgbClr>
             </a:solidFill>
             <a:prstDash val="solid"/>
@@ -9789,14 +10662,14 @@
       </p:sp>
       <p:sp>
         <p:nvSpPr>
-          <p:cNvPr id="27" name="Text 25"/>
-          <p:cNvSpPr/>
-          <p:nvPr/>
-        </p:nvSpPr>
-        <p:spPr>
-          <a:xfrm>
-            <a:off x="914400" y="4882896"/>
-            <a:ext cx="1600200" cy="256032"/>
+          <p:cNvPr id="54" name="Text 52"/>
+          <p:cNvSpPr/>
+          <p:nvPr/>
+        </p:nvSpPr>
+        <p:spPr>
+          <a:xfrm>
+            <a:off x="868680" y="6208776"/>
+            <a:ext cx="1554480" cy="201168"/>
           </a:xfrm>
           <a:prstGeom prst="rect">
             <a:avLst/>
@@ -9812,27 +10685,27 @@
               <a:buNone/>
             </a:pPr>
             <a:r>
-              <a:rPr lang="en-US" sz="1200" b="1" dirty="0">
+              <a:rPr lang="en-US" sz="930" b="1" dirty="0">
                 <a:solidFill>
                   <a:srgbClr val="108DFF"/>
                 </a:solidFill>
               </a:rPr>
               <a:t>15:00 - 16:00</a:t>
             </a:r>
-            <a:endParaRPr lang="en-US" sz="1200" dirty="0"/>
-          </a:p>
-        </p:txBody>
-      </p:sp>
-      <p:sp>
-        <p:nvSpPr>
-          <p:cNvPr id="28" name="Text 26"/>
-          <p:cNvSpPr/>
-          <p:nvPr/>
-        </p:nvSpPr>
-        <p:spPr>
-          <a:xfrm>
-            <a:off x="2743200" y="4882896"/>
-            <a:ext cx="7863840" cy="256032"/>
+            <a:endParaRPr lang="en-US" sz="930" dirty="0"/>
+          </a:p>
+        </p:txBody>
+      </p:sp>
+      <p:sp>
+        <p:nvSpPr>
+          <p:cNvPr id="55" name="Text 53"/>
+          <p:cNvSpPr/>
+          <p:nvPr/>
+        </p:nvSpPr>
+        <p:spPr>
+          <a:xfrm>
+            <a:off x="2651760" y="6208776"/>
+            <a:ext cx="8046720" cy="201168"/>
           </a:xfrm>
           <a:prstGeom prst="rect">
             <a:avLst/>
@@ -9848,26 +10721,26 @@
               <a:buNone/>
             </a:pPr>
             <a:r>
-              <a:rPr lang="en-US" sz="1240" dirty="0">
+              <a:rPr lang="en-US" sz="980" dirty="0">
                 <a:solidFill>
                   <a:srgbClr val="F6FBFF"/>
                 </a:solidFill>
               </a:rPr>
               <a:t>Pitch e avaliação final</a:t>
             </a:r>
-            <a:endParaRPr lang="en-US" sz="1240" dirty="0"/>
-          </a:p>
-        </p:txBody>
-      </p:sp>
-      <p:sp>
-        <p:nvSpPr>
-          <p:cNvPr id="29" name="Shape 27"/>
-          <p:cNvSpPr/>
-          <p:nvPr/>
-        </p:nvSpPr>
-        <p:spPr>
-          <a:xfrm>
-            <a:off x="868680" y="5266944"/>
+            <a:endParaRPr lang="en-US" sz="980" dirty="0"/>
+          </a:p>
+        </p:txBody>
+      </p:sp>
+      <p:sp>
+        <p:nvSpPr>
+          <p:cNvPr id="56" name="Shape 54"/>
+          <p:cNvSpPr/>
+          <p:nvPr/>
+        </p:nvSpPr>
+        <p:spPr>
+          <a:xfrm>
+            <a:off x="868680" y="6473952"/>
             <a:ext cx="10012680" cy="0"/>
           </a:xfrm>
           <a:prstGeom prst="line">
@@ -9877,7 +10750,7 @@
           <a:ln w="12700">
             <a:solidFill>
               <a:srgbClr val="1B6FB8">
-                <a:alpha val="32000"/>
+                <a:alpha val="26000"/>
               </a:srgbClr>
             </a:solidFill>
             <a:prstDash val="solid"/>
@@ -9886,7 +10759,7 @@
       </p:sp>
       <p:sp>
         <p:nvSpPr>
-          <p:cNvPr id="30" name="Text 28"/>
+          <p:cNvPr id="57" name="Text 55"/>
           <p:cNvSpPr/>
           <p:nvPr/>
         </p:nvSpPr>
